--- a/ch3_v01 Processes.pptx
+++ b/ch3_v01 Processes.pptx
@@ -217,135 +217,6 @@
 <file path=ppt/changesInfos/changesInfo1.xml><?xml version="1.0" encoding="utf-8"?>
 <pc:chgInfo xmlns:a="http://schemas.openxmlformats.org/drawingml/2006/main" xmlns:r="http://schemas.openxmlformats.org/officeDocument/2006/relationships" xmlns:ac="http://schemas.microsoft.com/office/drawing/2013/main/command" xmlns:pc="http://schemas.microsoft.com/office/powerpoint/2013/main/command">
   <pc:docChgLst>
-    <pc:chgData name="Siming Liu" userId="1e4b75e0-8938-470c-9583-bf4243e4c4f1" providerId="ADAL" clId="{195339DB-EC42-4B0D-AE71-519140076CAF}"/>
-    <pc:docChg chg="undo custSel addSld delSld modSld">
-      <pc:chgData name="Siming Liu" userId="1e4b75e0-8938-470c-9583-bf4243e4c4f1" providerId="ADAL" clId="{195339DB-EC42-4B0D-AE71-519140076CAF}" dt="2020-08-24T21:23:32.112" v="17" actId="47"/>
-      <pc:docMkLst>
-        <pc:docMk/>
-      </pc:docMkLst>
-      <pc:sldChg chg="addSp delSp mod">
-        <pc:chgData name="Siming Liu" userId="1e4b75e0-8938-470c-9583-bf4243e4c4f1" providerId="ADAL" clId="{195339DB-EC42-4B0D-AE71-519140076CAF}" dt="2020-08-23T05:11:15.972" v="1" actId="9405"/>
-        <pc:sldMkLst>
-          <pc:docMk/>
-          <pc:sldMk cId="0" sldId="330"/>
-        </pc:sldMkLst>
-        <pc:inkChg chg="add del">
-          <ac:chgData name="Siming Liu" userId="1e4b75e0-8938-470c-9583-bf4243e4c4f1" providerId="ADAL" clId="{195339DB-EC42-4B0D-AE71-519140076CAF}" dt="2020-08-23T05:11:15.972" v="1" actId="9405"/>
-          <ac:inkMkLst>
-            <pc:docMk/>
-            <pc:sldMk cId="0" sldId="330"/>
-            <ac:inkMk id="2" creationId="{4FE62FAB-848B-4C65-AD78-4C7CB967D2DA}"/>
-          </ac:inkMkLst>
-        </pc:inkChg>
-      </pc:sldChg>
-      <pc:sldChg chg="del">
-        <pc:chgData name="Siming Liu" userId="1e4b75e0-8938-470c-9583-bf4243e4c4f1" providerId="ADAL" clId="{195339DB-EC42-4B0D-AE71-519140076CAF}" dt="2020-08-24T21:18:27.799" v="5" actId="47"/>
-        <pc:sldMkLst>
-          <pc:docMk/>
-          <pc:sldMk cId="0" sldId="446"/>
-        </pc:sldMkLst>
-      </pc:sldChg>
-      <pc:sldChg chg="del">
-        <pc:chgData name="Siming Liu" userId="1e4b75e0-8938-470c-9583-bf4243e4c4f1" providerId="ADAL" clId="{195339DB-EC42-4B0D-AE71-519140076CAF}" dt="2020-08-24T21:18:22.865" v="4" actId="47"/>
-        <pc:sldMkLst>
-          <pc:docMk/>
-          <pc:sldMk cId="0" sldId="447"/>
-        </pc:sldMkLst>
-      </pc:sldChg>
-      <pc:sldChg chg="del">
-        <pc:chgData name="Siming Liu" userId="1e4b75e0-8938-470c-9583-bf4243e4c4f1" providerId="ADAL" clId="{195339DB-EC42-4B0D-AE71-519140076CAF}" dt="2020-08-24T21:18:19.362" v="3" actId="47"/>
-        <pc:sldMkLst>
-          <pc:docMk/>
-          <pc:sldMk cId="0" sldId="448"/>
-        </pc:sldMkLst>
-      </pc:sldChg>
-      <pc:sldChg chg="del">
-        <pc:chgData name="Siming Liu" userId="1e4b75e0-8938-470c-9583-bf4243e4c4f1" providerId="ADAL" clId="{195339DB-EC42-4B0D-AE71-519140076CAF}" dt="2020-08-24T21:19:22.844" v="14" actId="47"/>
-        <pc:sldMkLst>
-          <pc:docMk/>
-          <pc:sldMk cId="0" sldId="451"/>
-        </pc:sldMkLst>
-      </pc:sldChg>
-      <pc:sldChg chg="del">
-        <pc:chgData name="Siming Liu" userId="1e4b75e0-8938-470c-9583-bf4243e4c4f1" providerId="ADAL" clId="{195339DB-EC42-4B0D-AE71-519140076CAF}" dt="2020-08-24T21:18:57.955" v="10" actId="47"/>
-        <pc:sldMkLst>
-          <pc:docMk/>
-          <pc:sldMk cId="0" sldId="464"/>
-        </pc:sldMkLst>
-      </pc:sldChg>
-      <pc:sldChg chg="del">
-        <pc:chgData name="Siming Liu" userId="1e4b75e0-8938-470c-9583-bf4243e4c4f1" providerId="ADAL" clId="{195339DB-EC42-4B0D-AE71-519140076CAF}" dt="2020-08-24T21:18:56.177" v="9" actId="47"/>
-        <pc:sldMkLst>
-          <pc:docMk/>
-          <pc:sldMk cId="0" sldId="465"/>
-        </pc:sldMkLst>
-      </pc:sldChg>
-      <pc:sldChg chg="del">
-        <pc:chgData name="Siming Liu" userId="1e4b75e0-8938-470c-9583-bf4243e4c4f1" providerId="ADAL" clId="{195339DB-EC42-4B0D-AE71-519140076CAF}" dt="2020-08-24T21:18:51.970" v="6" actId="47"/>
-        <pc:sldMkLst>
-          <pc:docMk/>
-          <pc:sldMk cId="0" sldId="466"/>
-        </pc:sldMkLst>
-      </pc:sldChg>
-      <pc:sldChg chg="add del">
-        <pc:chgData name="Siming Liu" userId="1e4b75e0-8938-470c-9583-bf4243e4c4f1" providerId="ADAL" clId="{195339DB-EC42-4B0D-AE71-519140076CAF}" dt="2020-08-24T21:18:54.575" v="8" actId="47"/>
-        <pc:sldMkLst>
-          <pc:docMk/>
-          <pc:sldMk cId="0" sldId="467"/>
-        </pc:sldMkLst>
-      </pc:sldChg>
-      <pc:sldChg chg="del">
-        <pc:chgData name="Siming Liu" userId="1e4b75e0-8938-470c-9583-bf4243e4c4f1" providerId="ADAL" clId="{195339DB-EC42-4B0D-AE71-519140076CAF}" dt="2020-08-23T05:11:55.578" v="2" actId="47"/>
-        <pc:sldMkLst>
-          <pc:docMk/>
-          <pc:sldMk cId="0" sldId="469"/>
-        </pc:sldMkLst>
-      </pc:sldChg>
-      <pc:sldChg chg="del">
-        <pc:chgData name="Siming Liu" userId="1e4b75e0-8938-470c-9583-bf4243e4c4f1" providerId="ADAL" clId="{195339DB-EC42-4B0D-AE71-519140076CAF}" dt="2020-08-24T21:23:32.112" v="17" actId="47"/>
-        <pc:sldMkLst>
-          <pc:docMk/>
-          <pc:sldMk cId="0" sldId="476"/>
-        </pc:sldMkLst>
-      </pc:sldChg>
-      <pc:sldChg chg="del">
-        <pc:chgData name="Siming Liu" userId="1e4b75e0-8938-470c-9583-bf4243e4c4f1" providerId="ADAL" clId="{195339DB-EC42-4B0D-AE71-519140076CAF}" dt="2020-08-24T21:19:15.016" v="13" actId="47"/>
-        <pc:sldMkLst>
-          <pc:docMk/>
-          <pc:sldMk cId="0" sldId="496"/>
-        </pc:sldMkLst>
-      </pc:sldChg>
-      <pc:sldChg chg="del">
-        <pc:chgData name="Siming Liu" userId="1e4b75e0-8938-470c-9583-bf4243e4c4f1" providerId="ADAL" clId="{195339DB-EC42-4B0D-AE71-519140076CAF}" dt="2020-08-24T21:19:10.654" v="11" actId="47"/>
-        <pc:sldMkLst>
-          <pc:docMk/>
-          <pc:sldMk cId="0" sldId="497"/>
-        </pc:sldMkLst>
-      </pc:sldChg>
-      <pc:sldChg chg="del">
-        <pc:chgData name="Siming Liu" userId="1e4b75e0-8938-470c-9583-bf4243e4c4f1" providerId="ADAL" clId="{195339DB-EC42-4B0D-AE71-519140076CAF}" dt="2020-08-24T21:19:11.136" v="12" actId="47"/>
-        <pc:sldMkLst>
-          <pc:docMk/>
-          <pc:sldMk cId="0" sldId="498"/>
-        </pc:sldMkLst>
-      </pc:sldChg>
-      <pc:sldChg chg="del">
-        <pc:chgData name="Siming Liu" userId="1e4b75e0-8938-470c-9583-bf4243e4c4f1" providerId="ADAL" clId="{195339DB-EC42-4B0D-AE71-519140076CAF}" dt="2020-08-24T21:19:43.163" v="15" actId="47"/>
-        <pc:sldMkLst>
-          <pc:docMk/>
-          <pc:sldMk cId="1909953017" sldId="501"/>
-        </pc:sldMkLst>
-      </pc:sldChg>
-      <pc:sldChg chg="del">
-        <pc:chgData name="Siming Liu" userId="1e4b75e0-8938-470c-9583-bf4243e4c4f1" providerId="ADAL" clId="{195339DB-EC42-4B0D-AE71-519140076CAF}" dt="2020-08-24T21:19:43.677" v="16" actId="47"/>
-        <pc:sldMkLst>
-          <pc:docMk/>
-          <pc:sldMk cId="2310095677" sldId="502"/>
-        </pc:sldMkLst>
-      </pc:sldChg>
-    </pc:docChg>
-  </pc:docChgLst>
-  <pc:docChgLst>
     <pc:chgData name="Liu, Siming" userId="1e4b75e0-8938-470c-9583-bf4243e4c4f1" providerId="ADAL" clId="{93727D5B-06C8-4B32-A0E1-1885DE8D881C}"/>
     <pc:docChg chg="undo custSel addSld delSld modSld">
       <pc:chgData name="Liu, Siming" userId="1e4b75e0-8938-470c-9583-bf4243e4c4f1" providerId="ADAL" clId="{93727D5B-06C8-4B32-A0E1-1885DE8D881C}" dt="2024-08-27T13:49:20.073" v="86" actId="14100"/>
@@ -546,6 +417,135 @@
       </pc:sldChg>
     </pc:docChg>
   </pc:docChgLst>
+  <pc:docChgLst>
+    <pc:chgData name="Siming Liu" userId="1e4b75e0-8938-470c-9583-bf4243e4c4f1" providerId="ADAL" clId="{195339DB-EC42-4B0D-AE71-519140076CAF}"/>
+    <pc:docChg chg="undo custSel addSld delSld modSld">
+      <pc:chgData name="Siming Liu" userId="1e4b75e0-8938-470c-9583-bf4243e4c4f1" providerId="ADAL" clId="{195339DB-EC42-4B0D-AE71-519140076CAF}" dt="2020-08-24T21:23:32.112" v="17" actId="47"/>
+      <pc:docMkLst>
+        <pc:docMk/>
+      </pc:docMkLst>
+      <pc:sldChg chg="addSp delSp mod">
+        <pc:chgData name="Siming Liu" userId="1e4b75e0-8938-470c-9583-bf4243e4c4f1" providerId="ADAL" clId="{195339DB-EC42-4B0D-AE71-519140076CAF}" dt="2020-08-23T05:11:15.972" v="1" actId="9405"/>
+        <pc:sldMkLst>
+          <pc:docMk/>
+          <pc:sldMk cId="0" sldId="330"/>
+        </pc:sldMkLst>
+        <pc:inkChg chg="add del">
+          <ac:chgData name="Siming Liu" userId="1e4b75e0-8938-470c-9583-bf4243e4c4f1" providerId="ADAL" clId="{195339DB-EC42-4B0D-AE71-519140076CAF}" dt="2020-08-23T05:11:15.972" v="1" actId="9405"/>
+          <ac:inkMkLst>
+            <pc:docMk/>
+            <pc:sldMk cId="0" sldId="330"/>
+            <ac:inkMk id="2" creationId="{4FE62FAB-848B-4C65-AD78-4C7CB967D2DA}"/>
+          </ac:inkMkLst>
+        </pc:inkChg>
+      </pc:sldChg>
+      <pc:sldChg chg="del">
+        <pc:chgData name="Siming Liu" userId="1e4b75e0-8938-470c-9583-bf4243e4c4f1" providerId="ADAL" clId="{195339DB-EC42-4B0D-AE71-519140076CAF}" dt="2020-08-24T21:18:27.799" v="5" actId="47"/>
+        <pc:sldMkLst>
+          <pc:docMk/>
+          <pc:sldMk cId="0" sldId="446"/>
+        </pc:sldMkLst>
+      </pc:sldChg>
+      <pc:sldChg chg="del">
+        <pc:chgData name="Siming Liu" userId="1e4b75e0-8938-470c-9583-bf4243e4c4f1" providerId="ADAL" clId="{195339DB-EC42-4B0D-AE71-519140076CAF}" dt="2020-08-24T21:18:22.865" v="4" actId="47"/>
+        <pc:sldMkLst>
+          <pc:docMk/>
+          <pc:sldMk cId="0" sldId="447"/>
+        </pc:sldMkLst>
+      </pc:sldChg>
+      <pc:sldChg chg="del">
+        <pc:chgData name="Siming Liu" userId="1e4b75e0-8938-470c-9583-bf4243e4c4f1" providerId="ADAL" clId="{195339DB-EC42-4B0D-AE71-519140076CAF}" dt="2020-08-24T21:18:19.362" v="3" actId="47"/>
+        <pc:sldMkLst>
+          <pc:docMk/>
+          <pc:sldMk cId="0" sldId="448"/>
+        </pc:sldMkLst>
+      </pc:sldChg>
+      <pc:sldChg chg="del">
+        <pc:chgData name="Siming Liu" userId="1e4b75e0-8938-470c-9583-bf4243e4c4f1" providerId="ADAL" clId="{195339DB-EC42-4B0D-AE71-519140076CAF}" dt="2020-08-24T21:19:22.844" v="14" actId="47"/>
+        <pc:sldMkLst>
+          <pc:docMk/>
+          <pc:sldMk cId="0" sldId="451"/>
+        </pc:sldMkLst>
+      </pc:sldChg>
+      <pc:sldChg chg="del">
+        <pc:chgData name="Siming Liu" userId="1e4b75e0-8938-470c-9583-bf4243e4c4f1" providerId="ADAL" clId="{195339DB-EC42-4B0D-AE71-519140076CAF}" dt="2020-08-24T21:18:57.955" v="10" actId="47"/>
+        <pc:sldMkLst>
+          <pc:docMk/>
+          <pc:sldMk cId="0" sldId="464"/>
+        </pc:sldMkLst>
+      </pc:sldChg>
+      <pc:sldChg chg="del">
+        <pc:chgData name="Siming Liu" userId="1e4b75e0-8938-470c-9583-bf4243e4c4f1" providerId="ADAL" clId="{195339DB-EC42-4B0D-AE71-519140076CAF}" dt="2020-08-24T21:18:56.177" v="9" actId="47"/>
+        <pc:sldMkLst>
+          <pc:docMk/>
+          <pc:sldMk cId="0" sldId="465"/>
+        </pc:sldMkLst>
+      </pc:sldChg>
+      <pc:sldChg chg="del">
+        <pc:chgData name="Siming Liu" userId="1e4b75e0-8938-470c-9583-bf4243e4c4f1" providerId="ADAL" clId="{195339DB-EC42-4B0D-AE71-519140076CAF}" dt="2020-08-24T21:18:51.970" v="6" actId="47"/>
+        <pc:sldMkLst>
+          <pc:docMk/>
+          <pc:sldMk cId="0" sldId="466"/>
+        </pc:sldMkLst>
+      </pc:sldChg>
+      <pc:sldChg chg="add del">
+        <pc:chgData name="Siming Liu" userId="1e4b75e0-8938-470c-9583-bf4243e4c4f1" providerId="ADAL" clId="{195339DB-EC42-4B0D-AE71-519140076CAF}" dt="2020-08-24T21:18:54.575" v="8" actId="47"/>
+        <pc:sldMkLst>
+          <pc:docMk/>
+          <pc:sldMk cId="0" sldId="467"/>
+        </pc:sldMkLst>
+      </pc:sldChg>
+      <pc:sldChg chg="del">
+        <pc:chgData name="Siming Liu" userId="1e4b75e0-8938-470c-9583-bf4243e4c4f1" providerId="ADAL" clId="{195339DB-EC42-4B0D-AE71-519140076CAF}" dt="2020-08-23T05:11:55.578" v="2" actId="47"/>
+        <pc:sldMkLst>
+          <pc:docMk/>
+          <pc:sldMk cId="0" sldId="469"/>
+        </pc:sldMkLst>
+      </pc:sldChg>
+      <pc:sldChg chg="del">
+        <pc:chgData name="Siming Liu" userId="1e4b75e0-8938-470c-9583-bf4243e4c4f1" providerId="ADAL" clId="{195339DB-EC42-4B0D-AE71-519140076CAF}" dt="2020-08-24T21:23:32.112" v="17" actId="47"/>
+        <pc:sldMkLst>
+          <pc:docMk/>
+          <pc:sldMk cId="0" sldId="476"/>
+        </pc:sldMkLst>
+      </pc:sldChg>
+      <pc:sldChg chg="del">
+        <pc:chgData name="Siming Liu" userId="1e4b75e0-8938-470c-9583-bf4243e4c4f1" providerId="ADAL" clId="{195339DB-EC42-4B0D-AE71-519140076CAF}" dt="2020-08-24T21:19:15.016" v="13" actId="47"/>
+        <pc:sldMkLst>
+          <pc:docMk/>
+          <pc:sldMk cId="0" sldId="496"/>
+        </pc:sldMkLst>
+      </pc:sldChg>
+      <pc:sldChg chg="del">
+        <pc:chgData name="Siming Liu" userId="1e4b75e0-8938-470c-9583-bf4243e4c4f1" providerId="ADAL" clId="{195339DB-EC42-4B0D-AE71-519140076CAF}" dt="2020-08-24T21:19:10.654" v="11" actId="47"/>
+        <pc:sldMkLst>
+          <pc:docMk/>
+          <pc:sldMk cId="0" sldId="497"/>
+        </pc:sldMkLst>
+      </pc:sldChg>
+      <pc:sldChg chg="del">
+        <pc:chgData name="Siming Liu" userId="1e4b75e0-8938-470c-9583-bf4243e4c4f1" providerId="ADAL" clId="{195339DB-EC42-4B0D-AE71-519140076CAF}" dt="2020-08-24T21:19:11.136" v="12" actId="47"/>
+        <pc:sldMkLst>
+          <pc:docMk/>
+          <pc:sldMk cId="0" sldId="498"/>
+        </pc:sldMkLst>
+      </pc:sldChg>
+      <pc:sldChg chg="del">
+        <pc:chgData name="Siming Liu" userId="1e4b75e0-8938-470c-9583-bf4243e4c4f1" providerId="ADAL" clId="{195339DB-EC42-4B0D-AE71-519140076CAF}" dt="2020-08-24T21:19:43.163" v="15" actId="47"/>
+        <pc:sldMkLst>
+          <pc:docMk/>
+          <pc:sldMk cId="1909953017" sldId="501"/>
+        </pc:sldMkLst>
+      </pc:sldChg>
+      <pc:sldChg chg="del">
+        <pc:chgData name="Siming Liu" userId="1e4b75e0-8938-470c-9583-bf4243e4c4f1" providerId="ADAL" clId="{195339DB-EC42-4B0D-AE71-519140076CAF}" dt="2020-08-24T21:19:43.677" v="16" actId="47"/>
+        <pc:sldMkLst>
+          <pc:docMk/>
+          <pc:sldMk cId="2310095677" sldId="502"/>
+        </pc:sldMkLst>
+      </pc:sldChg>
+    </pc:docChg>
+  </pc:docChgLst>
 </pc:chgInfo>
 </file>
 
@@ -4142,7 +4142,7 @@
             </a:extLst>
           </p:cNvPr>
           <p:cNvSpPr>
-            <a:spLocks noChangeArrowheads="1" noTextEdit="1"/>
+            <a:spLocks noGrp="1" noRot="1" noChangeAspect="1" noChangeArrowheads="1" noTextEdit="1"/>
           </p:cNvSpPr>
           <p:nvPr>
             <p:ph type="sldImg"/>
@@ -4870,7 +4870,7 @@
             </a:extLst>
           </p:cNvPr>
           <p:cNvSpPr>
-            <a:spLocks noChangeArrowheads="1" noTextEdit="1"/>
+            <a:spLocks noGrp="1" noRot="1" noChangeAspect="1" noChangeArrowheads="1" noTextEdit="1"/>
           </p:cNvSpPr>
           <p:nvPr>
             <p:ph type="sldImg"/>
@@ -8599,7 +8599,7 @@
           <a:p>
             <a:pPr eaLnBrk="1" hangingPunct="1"/>
             <a:r>
-              <a:rPr lang="en-US" altLang="en-US"/>
+              <a:rPr lang="en-US" altLang="en-US" dirty="0"/>
               <a:t>Threads</a:t>
             </a:r>
           </a:p>
@@ -8666,7 +8666,7 @@
           </a:p>
           <a:p>
             <a:r>
-              <a:rPr lang="en-US" altLang="en-US"/>
+              <a:rPr lang="en-US" altLang="en-US" dirty="0"/>
               <a:t>More about this in the next chapter</a:t>
             </a:r>
           </a:p>
@@ -9589,7 +9589,7 @@
           <a:lstStyle/>
           <a:p>
             <a:r>
-              <a:rPr lang="en-US" altLang="en-US" sz="1600" b="1">
+              <a:rPr lang="en-US" altLang="en-US" sz="1600" b="1" dirty="0">
                 <a:solidFill>
                   <a:srgbClr val="3366FF"/>
                 </a:solidFill>
@@ -9597,11 +9597,11 @@
               <a:t>Short-term scheduler  </a:t>
             </a:r>
             <a:r>
-              <a:rPr lang="en-US" altLang="en-US" sz="1600"/>
+              <a:rPr lang="en-US" altLang="en-US" sz="1600" dirty="0"/>
               <a:t>(or </a:t>
             </a:r>
             <a:r>
-              <a:rPr lang="en-US" altLang="en-US" sz="1600" b="1">
+              <a:rPr lang="en-US" altLang="en-US" sz="1600" b="1" dirty="0">
                 <a:solidFill>
                   <a:srgbClr val="3366FF"/>
                 </a:solidFill>
@@ -9609,36 +9609,36 @@
               <a:t>CPU scheduler</a:t>
             </a:r>
             <a:r>
-              <a:rPr lang="en-US" altLang="en-US" sz="1600"/>
+              <a:rPr lang="en-US" altLang="en-US" sz="1600" dirty="0"/>
               <a:t>) – selects which process should be executed next and allocates CPU</a:t>
             </a:r>
           </a:p>
           <a:p>
             <a:pPr lvl="1"/>
             <a:r>
-              <a:rPr lang="en-US" altLang="en-US" sz="1600"/>
+              <a:rPr lang="en-US" altLang="en-US" sz="1600" dirty="0"/>
               <a:t>Sometimes the only scheduler in a system</a:t>
             </a:r>
           </a:p>
           <a:p>
             <a:pPr lvl="1"/>
             <a:r>
-              <a:rPr lang="en-US" altLang="en-US" sz="1600"/>
+              <a:rPr lang="en-US" altLang="en-US" sz="1600" dirty="0"/>
               <a:t>Short-term scheduler is invoked frequently (milliseconds) </a:t>
             </a:r>
             <a:r>
-              <a:rPr lang="en-US" altLang="en-US" sz="1600">
+              <a:rPr lang="en-US" altLang="en-US" sz="1600" dirty="0">
                 <a:sym typeface="Symbol" pitchFamily="18" charset="2"/>
               </a:rPr>
               <a:t> (must be fast)</a:t>
             </a:r>
-            <a:endParaRPr lang="en-US" altLang="en-US" sz="800">
+            <a:endParaRPr lang="en-US" altLang="en-US" sz="800" dirty="0">
               <a:sym typeface="Symbol" pitchFamily="18" charset="2"/>
             </a:endParaRPr>
           </a:p>
           <a:p>
             <a:r>
-              <a:rPr lang="en-US" altLang="en-US" sz="1600" b="1">
+              <a:rPr lang="en-US" altLang="en-US" sz="1600" b="1" dirty="0">
                 <a:solidFill>
                   <a:srgbClr val="3366FF"/>
                 </a:solidFill>
@@ -9646,11 +9646,11 @@
               <a:t>Long-term scheduler  </a:t>
             </a:r>
             <a:r>
-              <a:rPr lang="en-US" altLang="en-US" sz="1600"/>
+              <a:rPr lang="en-US" altLang="en-US" sz="1600" dirty="0"/>
               <a:t>(or </a:t>
             </a:r>
             <a:r>
-              <a:rPr lang="en-US" altLang="en-US" sz="1600" b="1">
+              <a:rPr lang="en-US" altLang="en-US" sz="1600" b="1" dirty="0">
                 <a:solidFill>
                   <a:srgbClr val="3366FF"/>
                 </a:solidFill>
@@ -9658,32 +9658,32 @@
               <a:t>job scheduler</a:t>
             </a:r>
             <a:r>
-              <a:rPr lang="en-US" altLang="en-US" sz="1600"/>
+              <a:rPr lang="en-US" altLang="en-US" sz="1600" dirty="0"/>
               <a:t>) – selects which processes should be brought into the ready queue</a:t>
             </a:r>
           </a:p>
           <a:p>
             <a:pPr lvl="1"/>
             <a:r>
-              <a:rPr lang="en-US" altLang="en-US" sz="1600">
+              <a:rPr lang="en-US" altLang="en-US" sz="1600" dirty="0">
                 <a:sym typeface="Symbol" pitchFamily="18" charset="2"/>
               </a:rPr>
               <a:t>Long-term scheduler is invoked  infrequently (seconds, minutes)  (may be slow)</a:t>
             </a:r>
-            <a:endParaRPr lang="en-US" altLang="en-US" sz="800">
+            <a:endParaRPr lang="en-US" altLang="en-US" sz="800" dirty="0">
               <a:sym typeface="Symbol" pitchFamily="18" charset="2"/>
             </a:endParaRPr>
           </a:p>
           <a:p>
             <a:pPr lvl="1"/>
             <a:r>
-              <a:rPr lang="en-US" altLang="en-US" sz="1600">
+              <a:rPr lang="en-US" altLang="en-US" sz="1600" dirty="0">
                 <a:sym typeface="Symbol" pitchFamily="18" charset="2"/>
               </a:rPr>
               <a:t>The long-term scheduler controls the </a:t>
             </a:r>
             <a:r>
-              <a:rPr lang="en-US" altLang="en-US" sz="1600" b="1">
+              <a:rPr lang="en-US" altLang="en-US" sz="1600" b="1" dirty="0">
                 <a:solidFill>
                   <a:srgbClr val="3366FF"/>
                 </a:solidFill>
@@ -9691,13 +9691,13 @@
               </a:rPr>
               <a:t>degree of multiprogramming</a:t>
             </a:r>
-            <a:endParaRPr lang="en-US" altLang="en-US" sz="800" i="1">
+            <a:endParaRPr lang="en-US" altLang="en-US" sz="800" i="1" dirty="0">
               <a:sym typeface="Symbol" pitchFamily="18" charset="2"/>
             </a:endParaRPr>
           </a:p>
           <a:p>
             <a:r>
-              <a:rPr lang="en-US" altLang="en-US" sz="1600">
+              <a:rPr lang="en-US" altLang="en-US" sz="1600" dirty="0">
                 <a:sym typeface="Symbol" pitchFamily="18" charset="2"/>
               </a:rPr>
               <a:t>Processes can be described as either:</a:t>
@@ -9706,7 +9706,7 @@
           <a:p>
             <a:pPr lvl="1"/>
             <a:r>
-              <a:rPr lang="en-US" altLang="en-US" sz="1600" b="1">
+              <a:rPr lang="en-US" altLang="en-US" sz="1600" b="1" dirty="0">
                 <a:solidFill>
                   <a:srgbClr val="3366FF"/>
                 </a:solidFill>
@@ -9715,7 +9715,7 @@
               <a:t>I/O-bound process</a:t>
             </a:r>
             <a:r>
-              <a:rPr lang="en-US" altLang="en-US" sz="1600">
+              <a:rPr lang="en-US" altLang="en-US" sz="1600" dirty="0">
                 <a:solidFill>
                   <a:srgbClr val="000000"/>
                 </a:solidFill>
@@ -9724,7 +9724,7 @@
               <a:t> </a:t>
             </a:r>
             <a:r>
-              <a:rPr lang="en-US" altLang="en-US" sz="1600">
+              <a:rPr lang="en-US" altLang="en-US" sz="1600" dirty="0">
                 <a:sym typeface="Symbol" pitchFamily="18" charset="2"/>
               </a:rPr>
               <a:t>– spends more time doing I/O than computations, many short CPU bursts</a:t>
@@ -9733,7 +9733,7 @@
           <a:p>
             <a:pPr lvl="1"/>
             <a:r>
-              <a:rPr lang="en-US" altLang="en-US" sz="1600" b="1">
+              <a:rPr lang="en-US" altLang="en-US" sz="1600" b="1" dirty="0">
                 <a:solidFill>
                   <a:srgbClr val="3366FF"/>
                 </a:solidFill>
@@ -9742,7 +9742,7 @@
               <a:t>CPU-bound process </a:t>
             </a:r>
             <a:r>
-              <a:rPr lang="en-US" altLang="en-US" sz="1600">
+              <a:rPr lang="en-US" altLang="en-US" sz="1600" dirty="0">
                 <a:sym typeface="Symbol" pitchFamily="18" charset="2"/>
               </a:rPr>
               <a:t>– spends more time doing computations; few very long CPU bursts</a:t>
@@ -9750,26 +9750,26 @@
           </a:p>
           <a:p>
             <a:r>
-              <a:rPr lang="en-US" altLang="en-US" sz="1600">
+              <a:rPr lang="en-US" altLang="en-US" sz="1600" dirty="0">
                 <a:sym typeface="Symbol" pitchFamily="18" charset="2"/>
               </a:rPr>
               <a:t>Long-term scheduler strives for good </a:t>
             </a:r>
             <a:r>
-              <a:rPr lang="en-US" altLang="en-US" sz="1600" b="1" i="1">
+              <a:rPr lang="en-US" altLang="en-US" sz="1600" b="1" i="1" dirty="0">
                 <a:sym typeface="Symbol" pitchFamily="18" charset="2"/>
               </a:rPr>
               <a:t>process mix</a:t>
             </a:r>
-            <a:endParaRPr lang="en-US" altLang="en-US" sz="1600">
+            <a:endParaRPr lang="en-US" altLang="en-US" sz="1600" dirty="0">
               <a:sym typeface="Symbol" pitchFamily="18" charset="2"/>
             </a:endParaRPr>
           </a:p>
           <a:p>
-            <a:endParaRPr lang="en-US" altLang="en-US"/>
-          </a:p>
-          <a:p>
-            <a:endParaRPr lang="en-US" altLang="en-US"/>
+            <a:endParaRPr lang="en-US" altLang="en-US" dirty="0"/>
+          </a:p>
+          <a:p>
+            <a:endParaRPr lang="en-US" altLang="en-US" dirty="0"/>
           </a:p>
         </p:txBody>
       </p:sp>
@@ -10338,11 +10338,11 @@
           <a:lstStyle/>
           <a:p>
             <a:r>
-              <a:rPr lang="en-US" altLang="en-US"/>
+              <a:rPr lang="en-US" altLang="en-US" dirty="0"/>
               <a:t>When CPU switches to another process, the system must </a:t>
             </a:r>
             <a:r>
-              <a:rPr lang="en-US" altLang="en-US" b="1">
+              <a:rPr lang="en-US" altLang="en-US" b="1" dirty="0">
                 <a:solidFill>
                   <a:srgbClr val="3366FF"/>
                 </a:solidFill>
@@ -10350,11 +10350,11 @@
               <a:t>save the state </a:t>
             </a:r>
             <a:r>
-              <a:rPr lang="en-US" altLang="en-US"/>
+              <a:rPr lang="en-US" altLang="en-US" dirty="0"/>
               <a:t>of the old process and load the </a:t>
             </a:r>
             <a:r>
-              <a:rPr lang="en-US" altLang="en-US" b="1">
+              <a:rPr lang="en-US" altLang="en-US" b="1" dirty="0">
                 <a:solidFill>
                   <a:srgbClr val="3366FF"/>
                 </a:solidFill>
@@ -10362,22 +10362,22 @@
               <a:t>saved state </a:t>
             </a:r>
             <a:r>
-              <a:rPr lang="en-US" altLang="en-US"/>
+              <a:rPr lang="en-US" altLang="en-US" dirty="0"/>
               <a:t>for the new process via a </a:t>
             </a:r>
             <a:r>
-              <a:rPr lang="en-US" altLang="en-US" b="1">
+              <a:rPr lang="en-US" altLang="en-US" b="1" dirty="0">
                 <a:solidFill>
                   <a:srgbClr val="3366FF"/>
                 </a:solidFill>
               </a:rPr>
               <a:t>context switch</a:t>
             </a:r>
-            <a:endParaRPr lang="en-US" altLang="en-US"/>
-          </a:p>
-          <a:p>
-            <a:r>
-              <a:rPr lang="en-US" altLang="en-US" b="1">
+            <a:endParaRPr lang="en-US" altLang="en-US" dirty="0"/>
+          </a:p>
+          <a:p>
+            <a:r>
+              <a:rPr lang="en-US" altLang="en-US" b="1" dirty="0">
                 <a:solidFill>
                   <a:srgbClr val="3366FF"/>
                 </a:solidFill>
@@ -10385,53 +10385,53 @@
               <a:t>Context </a:t>
             </a:r>
             <a:r>
-              <a:rPr lang="en-US" altLang="en-US"/>
+              <a:rPr lang="en-US" altLang="en-US" dirty="0"/>
               <a:t>of a process represented in the PCB</a:t>
             </a:r>
           </a:p>
           <a:p>
             <a:r>
-              <a:rPr lang="en-US" altLang="en-US"/>
+              <a:rPr lang="en-US" altLang="en-US" dirty="0"/>
               <a:t>Context-switch time is overhead; the system does no useful work while switching</a:t>
             </a:r>
           </a:p>
           <a:p>
             <a:pPr lvl="1"/>
             <a:r>
-              <a:rPr lang="en-US" altLang="en-US"/>
+              <a:rPr lang="en-US" altLang="en-US" dirty="0"/>
               <a:t>The more complex the OS and the PCB </a:t>
             </a:r>
             <a:r>
-              <a:rPr lang="en-US" altLang="en-US">
+              <a:rPr lang="en-US" altLang="en-US" dirty="0">
                 <a:sym typeface="Wingdings" pitchFamily="2" charset="2"/>
               </a:rPr>
               <a:t> the </a:t>
             </a:r>
             <a:r>
-              <a:rPr lang="en-US" altLang="en-US"/>
+              <a:rPr lang="en-US" altLang="en-US" dirty="0"/>
               <a:t>longer the context switch</a:t>
             </a:r>
           </a:p>
           <a:p>
             <a:r>
-              <a:rPr lang="en-US" altLang="en-US"/>
+              <a:rPr lang="en-US" altLang="en-US" dirty="0"/>
               <a:t>Time dependent on hardware support</a:t>
             </a:r>
           </a:p>
           <a:p>
             <a:pPr lvl="1"/>
             <a:r>
-              <a:rPr lang="en-US" altLang="en-US"/>
+              <a:rPr lang="en-US" altLang="en-US" dirty="0"/>
               <a:t>Some hardware provides multiple sets of registers per CPU </a:t>
             </a:r>
             <a:r>
-              <a:rPr lang="en-US" altLang="en-US">
+              <a:rPr lang="en-US" altLang="en-US" dirty="0">
                 <a:sym typeface="Wingdings" pitchFamily="2" charset="2"/>
               </a:rPr>
               <a:t></a:t>
             </a:r>
             <a:r>
-              <a:rPr lang="en-US" altLang="en-US"/>
+              <a:rPr lang="en-US" altLang="en-US" dirty="0"/>
               <a:t> multiple contexts loaded at once</a:t>
             </a:r>
           </a:p>
@@ -21968,7 +21968,7 @@
               <a:buNone/>
             </a:pPr>
             <a:r>
-              <a:rPr lang="en-US" altLang="en-US"/>
+              <a:rPr lang="en-US" altLang="en-US" dirty="0"/>
               <a:t>Information associated with each process </a:t>
             </a:r>
           </a:p>
@@ -21978,11 +21978,11 @@
               <a:buNone/>
             </a:pPr>
             <a:r>
-              <a:rPr lang="en-US" altLang="en-US"/>
+              <a:rPr lang="en-US" altLang="en-US" dirty="0"/>
               <a:t>(also called </a:t>
             </a:r>
             <a:r>
-              <a:rPr lang="en-US" altLang="en-US" b="1">
+              <a:rPr lang="en-US" altLang="en-US" b="1" dirty="0">
                 <a:solidFill>
                   <a:srgbClr val="3366FF"/>
                 </a:solidFill>
@@ -21990,54 +21990,54 @@
               <a:t>task control block</a:t>
             </a:r>
             <a:r>
-              <a:rPr lang="en-US" altLang="en-US"/>
+              <a:rPr lang="en-US" altLang="en-US" dirty="0"/>
               <a:t>)</a:t>
             </a:r>
           </a:p>
           <a:p>
             <a:r>
-              <a:rPr lang="en-US" altLang="en-US"/>
-              <a:t>Process state – running, waiting, etc</a:t>
-            </a:r>
-          </a:p>
-          <a:p>
-            <a:r>
-              <a:rPr lang="en-US" altLang="en-US"/>
+              <a:rPr lang="en-US" altLang="en-US" dirty="0"/>
+              <a:t> </a:t>
+            </a:r>
+          </a:p>
+          <a:p>
+            <a:r>
+              <a:rPr lang="en-US" altLang="en-US" dirty="0"/>
               <a:t>Program counter – location of instruction to next execute</a:t>
             </a:r>
           </a:p>
           <a:p>
             <a:r>
-              <a:rPr lang="en-US" altLang="en-US"/>
+              <a:rPr lang="en-US" altLang="en-US" dirty="0"/>
               <a:t>CPU registers – contents of all process-centric registers</a:t>
             </a:r>
           </a:p>
           <a:p>
             <a:r>
-              <a:rPr lang="en-US" altLang="en-US"/>
+              <a:rPr lang="en-US" altLang="en-US" dirty="0"/>
               <a:t>CPU scheduling information- priorities, scheduling queue pointers</a:t>
             </a:r>
           </a:p>
           <a:p>
             <a:r>
-              <a:rPr lang="en-US" altLang="en-US"/>
+              <a:rPr lang="en-US" altLang="en-US" dirty="0"/>
               <a:t>Memory-management information – memory allocated to the process</a:t>
             </a:r>
           </a:p>
           <a:p>
             <a:r>
-              <a:rPr lang="en-US" altLang="en-US"/>
+              <a:rPr lang="en-US" altLang="en-US" dirty="0"/>
               <a:t>Accounting information – CPU used, clock time elapsed since start, time limits</a:t>
             </a:r>
           </a:p>
           <a:p>
             <a:r>
-              <a:rPr lang="en-US" altLang="en-US"/>
+              <a:rPr lang="en-US" altLang="en-US" dirty="0"/>
               <a:t>I/O status information – I/O devices allocated to process, list of open files</a:t>
             </a:r>
           </a:p>
           <a:p>
-            <a:endParaRPr lang="en-US" altLang="en-US"/>
+            <a:endParaRPr lang="en-US" altLang="en-US" dirty="0"/>
           </a:p>
         </p:txBody>
       </p:sp>
